--- a/Project 3 Presentation.pptx
+++ b/Project 3 Presentation.pptx
@@ -2872,7 +2872,7 @@
           <a:spcPct val="20000"/>
         </a:spcBef>
         <a:buFont typeface="Arial"/>
-        <a:buChar char="–"/>
+        <a:buChar char="•"/>
         <a:defRPr sz="2800" kern="1200">
           <a:solidFill>
             <a:schemeClr val="tx1"/>
@@ -2902,7 +2902,7 @@
           <a:spcPct val="20000"/>
         </a:spcBef>
         <a:buFont typeface="Arial"/>
-        <a:buChar char="–"/>
+        <a:buChar char="•"/>
         <a:defRPr sz="2000" kern="1200">
           <a:solidFill>
             <a:schemeClr val="tx1"/>
@@ -3566,7 +3566,7 @@
                 </a:solidFill>
                 <a:latin typeface="Calibri"/>
               </a:rPr>
-              <a:t>Add the question body. I left it out in 2021 because it took much more memory and I wanted more rows, and titles often don’t name the tool.</a:t>
+              <a:t>Add the question body, since titles often don’t name the tool. I left it out in 2021 because it needed much more memory and I wanted more rows.</a:t>
             </a:r>
           </a:p>
           <a:p>
@@ -3586,7 +3586,7 @@
                 </a:solidFill>
                 <a:latin typeface="Calibri"/>
               </a:rPr>
-              <a:t>Fix the cleanup so C# and C++ survive in any case, and make the common-word filter ignore case (capitalized words like “How” got through).</a:t>
+              <a:t>Fix the cleanup so C# and C++ survive in any case and “c” isn’t dropped, and make the common-word filter ignore case (capitalized words like “How” got through).</a:t>
             </a:r>
           </a:p>
           <a:p>
@@ -5308,7 +5308,7 @@
                 </a:solidFill>
                 <a:latin typeface="Calibri"/>
               </a:rPr>
-              <a:t>Removed commas from titles and tags, and the angle brackets around tags, so the CSV would load cleanly</a:t>
+              <a:t>Removed commas from titles and tags so the CSV would load cleanly, and stripped the HTML angle brackets from the tags</a:t>
             </a:r>
           </a:p>
           <a:p>
@@ -5968,7 +5968,7 @@
                 </a:solidFill>
                 <a:latin typeface="Calibri"/>
               </a:rPr>
-              <a:t>Each model ran as 100 yes or no classifiers, one per tag (one-vs-rest), with default settings.</a:t>
+              <a:t>Each model ran as 100 yes or no classifiers, one per tag (one-vs-rest), without tuning.</a:t>
             </a:r>
           </a:p>
         </p:txBody>
@@ -7985,7 +7985,7 @@
                 </a:solidFill>
                 <a:latin typeface="Calibri"/>
               </a:rPr>
-              <a:t>100 folds was more than needed. The notebook notes that 15 folds gave similar results with much less load.</a:t>
+              <a:t>100 folds was probably more than needed; the notebook notes that 15 gave similar results with much less load.</a:t>
             </a:r>
           </a:p>
         </p:txBody>
@@ -11042,13 +11042,143 @@
                           </a:solidFill>
                           <a:latin typeface="Calibri"/>
                         </a:rPr>
+                        <a:t>jquery</a:t>
+                      </a:r>
+                    </a:p>
+                  </a:txBody>
+                  <a:tcPr marL="82296" marR="82296" marT="27432" marB="27432" anchor="ctr">
+                    <a:solidFill>
+                      <a:srgbClr val="FFFFFF"/>
+                    </a:solidFill>
+                    <a:lnL w="6350">
+                      <a:solidFill>
+                        <a:srgbClr val="D5DBE5"/>
+                      </a:solidFill>
+                    </a:lnL>
+                    <a:lnR w="6350">
+                      <a:solidFill>
+                        <a:srgbClr val="D5DBE5"/>
+                      </a:solidFill>
+                    </a:lnR>
+                    <a:lnT w="6350">
+                      <a:solidFill>
+                        <a:srgbClr val="D5DBE5"/>
+                      </a:solidFill>
+                    </a:lnT>
+                    <a:lnB w="6350">
+                      <a:solidFill>
+                        <a:srgbClr val="D5DBE5"/>
+                      </a:solidFill>
+                    </a:lnB>
+                  </a:tcPr>
+                </a:tc>
+                <a:tc>
+                  <a:txBody>
+                    <a:bodyPr wrap="square"/>
+                    <a:lstStyle/>
+                    <a:p>
+                      <a:pPr algn="r"/>
+                      <a:r>
+                        <a:rPr sz="1400" b="0" i="0">
+                          <a:solidFill>
+                            <a:srgbClr val="222222"/>
+                          </a:solidFill>
+                          <a:latin typeface="Calibri"/>
+                        </a:rPr>
+                        <a:t>151 of 218</a:t>
+                      </a:r>
+                    </a:p>
+                  </a:txBody>
+                  <a:tcPr marL="82296" marR="82296" marT="27432" marB="27432" anchor="ctr">
+                    <a:solidFill>
+                      <a:srgbClr val="FFFFFF"/>
+                    </a:solidFill>
+                    <a:lnL w="6350">
+                      <a:solidFill>
+                        <a:srgbClr val="D5DBE5"/>
+                      </a:solidFill>
+                    </a:lnL>
+                    <a:lnR w="6350">
+                      <a:solidFill>
+                        <a:srgbClr val="D5DBE5"/>
+                      </a:solidFill>
+                    </a:lnR>
+                    <a:lnT w="6350">
+                      <a:solidFill>
+                        <a:srgbClr val="D5DBE5"/>
+                      </a:solidFill>
+                    </a:lnT>
+                    <a:lnB w="6350">
+                      <a:solidFill>
+                        <a:srgbClr val="D5DBE5"/>
+                      </a:solidFill>
+                    </a:lnB>
+                  </a:tcPr>
+                </a:tc>
+                <a:tc>
+                  <a:txBody>
+                    <a:bodyPr wrap="square"/>
+                    <a:lstStyle/>
+                    <a:p>
+                      <a:pPr algn="r"/>
+                      <a:r>
+                        <a:rPr sz="1400" b="0" i="0">
+                          <a:solidFill>
+                            <a:srgbClr val="222222"/>
+                          </a:solidFill>
+                          <a:latin typeface="Calibri"/>
+                        </a:rPr>
+                        <a:t>69%</a:t>
+                      </a:r>
+                    </a:p>
+                  </a:txBody>
+                  <a:tcPr marL="82296" marR="82296" marT="27432" marB="27432" anchor="ctr">
+                    <a:solidFill>
+                      <a:srgbClr val="FFFFFF"/>
+                    </a:solidFill>
+                    <a:lnL w="6350">
+                      <a:solidFill>
+                        <a:srgbClr val="D5DBE5"/>
+                      </a:solidFill>
+                    </a:lnL>
+                    <a:lnR w="6350">
+                      <a:solidFill>
+                        <a:srgbClr val="D5DBE5"/>
+                      </a:solidFill>
+                    </a:lnR>
+                    <a:lnT w="6350">
+                      <a:solidFill>
+                        <a:srgbClr val="D5DBE5"/>
+                      </a:solidFill>
+                    </a:lnT>
+                    <a:lnB w="6350">
+                      <a:solidFill>
+                        <a:srgbClr val="D5DBE5"/>
+                      </a:solidFill>
+                    </a:lnB>
+                  </a:tcPr>
+                </a:tc>
+              </a:tr>
+              <a:tr h="356616">
+                <a:tc>
+                  <a:txBody>
+                    <a:bodyPr wrap="square"/>
+                    <a:lstStyle/>
+                    <a:p>
+                      <a:r>
+                        <a:rPr sz="1400" b="0" i="0">
+                          <a:solidFill>
+                            <a:srgbClr val="222222"/>
+                          </a:solidFill>
+                          <a:latin typeface="Calibri"/>
+                        </a:rPr>
                         <a:t>php</a:t>
                       </a:r>
                     </a:p>
                   </a:txBody>
                   <a:tcPr marL="82296" marR="82296" marT="27432" marB="27432" anchor="ctr">
                     <a:solidFill>
-                      <a:srgbClr val="FFFFFF"/>
+                      <a:srgbClr val="F1F4F9"/>
                     </a:solidFill>
                     <a:lnL w="6350">
                       <a:solidFill>
@@ -11091,7 +11221,7 @@
                   </a:txBody>
                   <a:tcPr marL="82296" marR="82296" marT="27432" marB="27432" anchor="ctr">
                     <a:solidFill>
-                      <a:srgbClr val="FFFFFF"/>
+                      <a:srgbClr val="F1F4F9"/>
                     </a:solidFill>
                     <a:lnL w="6350">
                       <a:solidFill>
@@ -11134,136 +11264,6 @@
                   </a:txBody>
                   <a:tcPr marL="82296" marR="82296" marT="27432" marB="27432" anchor="ctr">
                     <a:solidFill>
-                      <a:srgbClr val="FFFFFF"/>
-                    </a:solidFill>
-                    <a:lnL w="6350">
-                      <a:solidFill>
-                        <a:srgbClr val="D5DBE5"/>
-                      </a:solidFill>
-                    </a:lnL>
-                    <a:lnR w="6350">
-                      <a:solidFill>
-                        <a:srgbClr val="D5DBE5"/>
-                      </a:solidFill>
-                    </a:lnR>
-                    <a:lnT w="6350">
-                      <a:solidFill>
-                        <a:srgbClr val="D5DBE5"/>
-                      </a:solidFill>
-                    </a:lnT>
-                    <a:lnB w="6350">
-                      <a:solidFill>
-                        <a:srgbClr val="D5DBE5"/>
-                      </a:solidFill>
-                    </a:lnB>
-                  </a:tcPr>
-                </a:tc>
-              </a:tr>
-              <a:tr h="356616">
-                <a:tc>
-                  <a:txBody>
-                    <a:bodyPr wrap="square"/>
-                    <a:lstStyle/>
-                    <a:p>
-                      <a:r>
-                        <a:rPr sz="1400" b="0" i="0">
-                          <a:solidFill>
-                            <a:srgbClr val="222222"/>
-                          </a:solidFill>
-                          <a:latin typeface="Calibri"/>
-                        </a:rPr>
-                        <a:t>android</a:t>
-                      </a:r>
-                    </a:p>
-                  </a:txBody>
-                  <a:tcPr marL="82296" marR="82296" marT="27432" marB="27432" anchor="ctr">
-                    <a:solidFill>
-                      <a:srgbClr val="F1F4F9"/>
-                    </a:solidFill>
-                    <a:lnL w="6350">
-                      <a:solidFill>
-                        <a:srgbClr val="D5DBE5"/>
-                      </a:solidFill>
-                    </a:lnL>
-                    <a:lnR w="6350">
-                      <a:solidFill>
-                        <a:srgbClr val="D5DBE5"/>
-                      </a:solidFill>
-                    </a:lnR>
-                    <a:lnT w="6350">
-                      <a:solidFill>
-                        <a:srgbClr val="D5DBE5"/>
-                      </a:solidFill>
-                    </a:lnT>
-                    <a:lnB w="6350">
-                      <a:solidFill>
-                        <a:srgbClr val="D5DBE5"/>
-                      </a:solidFill>
-                    </a:lnB>
-                  </a:tcPr>
-                </a:tc>
-                <a:tc>
-                  <a:txBody>
-                    <a:bodyPr wrap="square"/>
-                    <a:lstStyle/>
-                    <a:p>
-                      <a:pPr algn="r"/>
-                      <a:r>
-                        <a:rPr sz="1400" b="0" i="0">
-                          <a:solidFill>
-                            <a:srgbClr val="222222"/>
-                          </a:solidFill>
-                          <a:latin typeface="Calibri"/>
-                        </a:rPr>
-                        <a:t>176 of 234</a:t>
-                      </a:r>
-                    </a:p>
-                  </a:txBody>
-                  <a:tcPr marL="82296" marR="82296" marT="27432" marB="27432" anchor="ctr">
-                    <a:solidFill>
-                      <a:srgbClr val="F1F4F9"/>
-                    </a:solidFill>
-                    <a:lnL w="6350">
-                      <a:solidFill>
-                        <a:srgbClr val="D5DBE5"/>
-                      </a:solidFill>
-                    </a:lnL>
-                    <a:lnR w="6350">
-                      <a:solidFill>
-                        <a:srgbClr val="D5DBE5"/>
-                      </a:solidFill>
-                    </a:lnR>
-                    <a:lnT w="6350">
-                      <a:solidFill>
-                        <a:srgbClr val="D5DBE5"/>
-                      </a:solidFill>
-                    </a:lnT>
-                    <a:lnB w="6350">
-                      <a:solidFill>
-                        <a:srgbClr val="D5DBE5"/>
-                      </a:solidFill>
-                    </a:lnB>
-                  </a:tcPr>
-                </a:tc>
-                <a:tc>
-                  <a:txBody>
-                    <a:bodyPr wrap="square"/>
-                    <a:lstStyle/>
-                    <a:p>
-                      <a:pPr algn="r"/>
-                      <a:r>
-                        <a:rPr sz="1400" b="0" i="0">
-                          <a:solidFill>
-                            <a:srgbClr val="222222"/>
-                          </a:solidFill>
-                          <a:latin typeface="Calibri"/>
-                        </a:rPr>
-                        <a:t>75%</a:t>
-                      </a:r>
-                    </a:p>
-                  </a:txBody>
-                  <a:tcPr marL="82296" marR="82296" marT="27432" marB="27432" anchor="ctr">
-                    <a:solidFill>
                       <a:srgbClr val="F1F4F9"/>
                     </a:solidFill>
                     <a:lnL w="6350">
@@ -11330,7 +11330,7 @@
                 </a:solidFill>
                 <a:latin typeface="Calibri"/>
               </a:rPr>
-              <a:t>The best tags are names of tools that tend to appear in titles. Broad topic tags did worst: 11 tags were never predicted correctly, including oop, class, file, math, coding-style and language-agnostic.</a:t>
+              <a:t>The best tags are names of specific tools, which often appear in titles. Most of the 11 tags that were never predicted correctly are broad topics, such as oop, class, file, math and coding-style.</a:t>
             </a:r>
           </a:p>
         </p:txBody>
@@ -12385,7 +12385,7 @@
                 </a:solidFill>
                 <a:latin typeface="Calibri"/>
               </a:rPr>
-              <a:t>For most tags the strongest word is the tag’s own name. The exception here is c++, where it is “std”; the next slide explains why.</a:t>
+              <a:t>For most tags the strongest word is the tag’s own name. The exception here is c++, where it is “std”; the next slide shows why.</a:t>
             </a:r>
           </a:p>
         </p:txBody>
@@ -12445,7 +12445,7 @@
                 </a:solidFill>
                 <a:latin typeface="Calibri"/>
               </a:rPr>
-              <a:t>Why c#, c++ and c scored low</a:t>
+              <a:t>What the cleanup did to C# and C++</a:t>
             </a:r>
           </a:p>
         </p:txBody>
@@ -12617,7 +12617,7 @@
                 </a:solidFill>
                 <a:latin typeface="Calibri"/>
               </a:rPr>
-              <a:t>The TF-IDF step ignored one-letter words, so the “C” was dropped too. For those titles the model never saw the language name.</a:t>
+              <a:t>The TF-IDF step ignored one-letter words, so the “C” was dropped too, and for those titles the model never saw the language name. The same cleanup turned “C/C++” into “cc”, the strongest word for the c tag.</a:t>
             </a:r>
           </a:p>
           <a:p>
@@ -12636,7 +12636,7 @@
                 </a:solidFill>
                 <a:latin typeface="Calibri"/>
               </a:rPr>
-              <a:t>The same cleanup turned “C/C++” into “cc”, which became the strongest word for the c tag.</a:t>
+              <a:t>This is probably part of why these three tags scored so low.</a:t>
             </a:r>
           </a:p>
           <a:p>
@@ -12655,7 +12655,7 @@
                 </a:solidFill>
                 <a:latin typeface="Calibri"/>
               </a:rPr>
-              <a:t>The fix is to match tag names in any case before removing punctuation.</a:t>
+              <a:t>The fix is to match tag names in any case before removing punctuation, and to let TF-IDF keep one-letter words such as “c”.</a:t>
             </a:r>
           </a:p>
         </p:txBody>

--- a/Project 3 Presentation.pptx
+++ b/Project 3 Presentation.pptx
@@ -7947,7 +7947,7 @@
                 </a:solidFill>
                 <a:latin typeface="Calibri"/>
               </a:rPr>
-              <a:t>A grid search tried C = 1, 10, 100 and 1,000 with 100-fold cross-validation: 400 fits, about four minutes on a 32-thread computer.</a:t>
+              <a:t>A grid search tried C = 1, 10, 100 and 1,000 with 100-fold cross-validation: 400 fits, about four minutes on a computer with 32 threads.</a:t>
             </a:r>
           </a:p>
           <a:p>
@@ -12669,7 +12669,7 @@
         <p:spPr>
           <a:xfrm>
             <a:off x="7269480" y="1463040"/>
-            <a:ext cx="4389120" cy="2057400"/>
+            <a:ext cx="4389120" cy="1783080"/>
           </a:xfrm>
           <a:prstGeom prst="rect">
             <a:avLst/>
@@ -12696,7 +12696,7 @@
         <p:spPr>
           <a:xfrm>
             <a:off x="7498079" y="1600200"/>
-            <a:ext cx="3977639" cy="2103120"/>
+            <a:ext cx="3977639" cy="1645920"/>
           </a:xfrm>
           <a:prstGeom prst="rect">
             <a:avLst/>

--- a/Project 3 Presentation.pptx
+++ b/Project 3 Presentation.pptx
@@ -121,26 +121,26 @@
   <p:extLst>
     <p:ext uri="{521415D9-36F7-43E2-AB2F-B90AF26B5E84}">
       <p14:sectionLst xmlns:p14="http://schemas.microsoft.com/office/powerpoint/2010/main">
-        <p14:section name="Introduction" id="{18690755-567b-a9af-e302-c7742fc68496}">
+        <p14:section name="Introduction" id="{c05733db-4c10-fd71-50a3-5cb6f4a2d1b4}">
           <p14:sldIdLst>
             <p14:sldId id="256"/>
             <p14:sldId id="257"/>
           </p14:sldIdLst>
         </p14:section>
-        <p14:section name="Data" id="{450e878d-b51b-ef43-6edd-9293f13deb28}">
+        <p14:section name="Data" id="{6b797207-517d-49f6-1487-6ea770a63bbb}">
           <p14:sldIdLst>
             <p14:sldId id="258"/>
             <p14:sldId id="259"/>
             <p14:sldId id="260"/>
           </p14:sldIdLst>
         </p14:section>
-        <p14:section name="Method" id="{e8fec15b-e754-caee-ee0f-58d6d2d5b23b}">
+        <p14:section name="Method" id="{6771bbeb-6c4d-0708-7255-e223bde6a87f}">
           <p14:sldIdLst>
             <p14:sldId id="261"/>
             <p14:sldId id="262"/>
           </p14:sldIdLst>
         </p14:section>
-        <p14:section name="Results" id="{2728c555-f627-681c-2ba1-29f21ba9f774}">
+        <p14:section name="Results" id="{ff505cab-a91b-491e-ab0c-335db3f85f54}">
           <p14:sldIdLst>
             <p14:sldId id="263"/>
             <p14:sldId id="264"/>
@@ -150,7 +150,7 @@
             <p14:sldId id="268"/>
           </p14:sldIdLst>
         </p14:section>
-        <p14:section name="Lessons" id="{69494ebd-154d-f96a-5213-855f27147ac3}">
+        <p14:section name="Lessons" id="{513c3f98-b450-8652-9697-65e05a24591e}">
           <p14:sldIdLst>
             <p14:sldId id="269"/>
             <p14:sldId id="270"/>
@@ -987,40 +987,40 @@
                 <c:formatCode>General</c:formatCode>
                 <c:ptCount val="12"/>
                 <c:pt idx="0">
-                  <c:v>48.5</c:v>
+                  <c:v>48.49621094740401</c:v>
                 </c:pt>
                 <c:pt idx="1">
-                  <c:v>47.76</c:v>
+                  <c:v>47.7634260172221</c:v>
                 </c:pt>
                 <c:pt idx="2">
-                  <c:v>45.94</c:v>
+                  <c:v>45.93669887596135</c:v>
                 </c:pt>
                 <c:pt idx="3">
-                  <c:v>45.9</c:v>
+                  <c:v>45.897258923289286</c:v>
                 </c:pt>
                 <c:pt idx="4">
-                  <c:v>45.78</c:v>
+                  <c:v>45.77959639781765</c:v>
                 </c:pt>
                 <c:pt idx="5">
-                  <c:v>45.73</c:v>
+                  <c:v>45.72832445934398</c:v>
                 </c:pt>
                 <c:pt idx="6">
-                  <c:v>43.11</c:v>
+                  <c:v>43.10631884384596</c:v>
                 </c:pt>
                 <c:pt idx="7">
-                  <c:v>42.68</c:v>
+                  <c:v>42.677479787024254</c:v>
                 </c:pt>
                 <c:pt idx="8">
-                  <c:v>41.09</c:v>
+                  <c:v>41.08558469729836</c:v>
                 </c:pt>
                 <c:pt idx="9">
-                  <c:v>24.22</c:v>
+                  <c:v>24.218431604548744</c:v>
                 </c:pt>
                 <c:pt idx="10">
-                  <c:v>23.17</c:v>
+                  <c:v>23.167356865838425</c:v>
                 </c:pt>
                 <c:pt idx="11">
-                  <c:v>2.57</c:v>
+                  <c:v>2.5727761031448666</c:v>
                 </c:pt>
               </c:numCache>
             </c:numRef>
@@ -1223,7 +1223,7 @@
           </c:spPr>
           <c:invertIfNegative val="0"/>
           <c:dLbls>
-            <c:numFmt formatCode="0.00%" sourceLinked="0"/>
+            <c:numFmt formatCode="0.000%" sourceLinked="0"/>
             <c:txPr>
               <a:bodyPr/>
               <a:lstStyle/>
@@ -1431,47 +1431,47 @@
                 <c:formatCode>General</c:formatCode>
                 <c:ptCount val="12"/>
                 <c:pt idx="0">
-                  <c:v>0.011899999999999999</c:v>
+                  <c:v>0.011855649773220272</c:v>
                 </c:pt>
                 <c:pt idx="1">
-                  <c:v>0.0102</c:v>
+                  <c:v>0.010175507789390652</c:v>
                 </c:pt>
                 <c:pt idx="2">
-                  <c:v>0.010700000000000001</c:v>
+                  <c:v>0.010733583119700256</c:v>
                 </c:pt>
                 <c:pt idx="3">
-                  <c:v>0.0108</c:v>
+                  <c:v>0.010755275093669888</c:v>
                 </c:pt>
                 <c:pt idx="4">
-                  <c:v>0.0108</c:v>
+                  <c:v>0.010755275093669888</c:v>
                 </c:pt>
                 <c:pt idx="5">
-                  <c:v>0.0102</c:v>
+                  <c:v>0.010228751725497929</c:v>
                 </c:pt>
                 <c:pt idx="6">
-                  <c:v>0.0141</c:v>
+                  <c:v>0.014109643068428318</c:v>
                 </c:pt>
                 <c:pt idx="7">
-                  <c:v>0.017</c:v>
+                  <c:v>0.01699270360875567</c:v>
                 </c:pt>
                 <c:pt idx="8">
-                  <c:v>0.0109</c:v>
+                  <c:v>0.010932754880694144</c:v>
                 </c:pt>
                 <c:pt idx="9">
-                  <c:v>0.014199999999999999</c:v>
+                  <c:v>0.0142358509169789</c:v>
                 </c:pt>
                 <c:pt idx="10">
-                  <c:v>0.013500000000000002</c:v>
+                  <c:v>0.013512127785446658</c:v>
                 </c:pt>
                 <c:pt idx="11">
-                  <c:v>0.031400000000000004</c:v>
+                  <c:v>0.03140800631039243</c:v>
                 </c:pt>
               </c:numCache>
             </c:numRef>
           </c:val>
         </c:ser>
         <c:dLbls>
-          <c:numFmt formatCode="0.00%" sourceLinked="0"/>
+          <c:numFmt formatCode="0.000%" sourceLinked="0"/>
           <c:txPr>
             <a:bodyPr/>
             <a:lstStyle/>
@@ -1543,7 +1543,7 @@
         <c:axId val="2094734552"/>
         <c:scaling>
           <c:orientation val="minMax"/>
-          <c:max val="0.038"/>
+          <c:max val="0.04"/>
           <c:min val="0"/>
         </c:scaling>
         <c:delete val="1"/>
@@ -2405,7 +2405,7 @@
                 </a:solidFill>
                 <a:latin typeface="+mn-lt"/>
               </a:rPr>
-              <a:t>The eight most common tags</a:t>
+              <a:t>The eight most common tags overall</a:t>
             </a:r>
           </a:p>
         </c:rich>
@@ -5418,7 +5418,7 @@
           <a:spcPct val="20000"/>
         </a:spcBef>
         <a:buFont typeface="Arial" pitchFamily="34" charset="0"/>
-        <a:buChar char="–"/>
+        <a:buChar char="•"/>
         <a:defRPr sz="2800" kern="1200">
           <a:solidFill>
             <a:schemeClr val="tx1"/>
@@ -5448,7 +5448,7 @@
           <a:spcPct val="20000"/>
         </a:spcBef>
         <a:buFont typeface="Arial" pitchFamily="34" charset="0"/>
-        <a:buChar char="–"/>
+        <a:buChar char="•"/>
         <a:defRPr sz="2000" kern="1200">
           <a:solidFill>
             <a:schemeClr val="tx1"/>
@@ -6529,7 +6529,7 @@
                   <a:schemeClr val="tx1"/>
                 </a:solidFill>
               </a:rPr>
-              <a:t>Usually right, but it missed over half the tags</a:t>
+              <a:t>Most of its guesses were right, but it missed over half the tags</a:t>
             </a:r>
             <a:endParaRPr lang="en-US" sz="3000" dirty="0"/>
           </a:p>
@@ -12391,7 +12391,7 @@
       </p:sp>
       <p:sp>
         <p:nvSpPr>
-          <p:cNvPr id="19" name="chip cc"/>
+          <p:cNvPr id="19" name="chip CC"/>
           <p:cNvSpPr/>
           <p:nvPr/>
         </p:nvSpPr>
@@ -12423,7 +12423,7 @@
                   <a:schemeClr val="accent5"/>
                 </a:solidFill>
               </a:rPr>
-              <a:t>cc</a:t>
+              <a:t>CC</a:t>
             </a:r>
             <a:endParaRPr lang="en-US" sz="1500" dirty="0"/>
           </a:p>
@@ -12597,7 +12597,7 @@
         <p:spPr>
           <a:xfrm>
             <a:off x="548640" y="5486400"/>
-            <a:ext cx="5486400" cy="777240"/>
+            <a:ext cx="5486400" cy="868680"/>
           </a:xfrm>
           <a:prstGeom prst="rect">
             <a:avLst/>
@@ -12618,7 +12618,7 @@
                   <a:schemeClr val="tx1"/>
                 </a:solidFill>
               </a:rPr>
-              <a:t>This is probably part of why these three tags scored lowest. The fix: match tag names in any case before removing punctuation, and let TF-IDF keep one-letter words.</a:t>
+              <a:t>This is probably part of why these three scored lowest of the language tags. To fix it, I would match tag names in any case before removing punctuation, and let TF-IDF keep one-letter words.</a:t>
             </a:r>
             <a:endParaRPr lang="en-US" sz="1400" dirty="0"/>
           </a:p>
@@ -12750,45 +12750,7 @@
       </p:sp>
       <p:sp>
         <p:nvSpPr>
-          <p:cNvPr id="3" name="Text 0"/>
-          <p:cNvSpPr/>
-          <p:nvPr>
-            <p:ph idx="101" type="body" hasCustomPrompt="1"/>
-          </p:nvPr>
-        </p:nvSpPr>
-        <p:spPr>
-          <a:xfrm>
-            <a:off x="548640" y="987552"/>
-            <a:ext cx="11064240" cy="411480"/>
-          </a:xfrm>
-          <a:prstGeom prst="rect">
-            <a:avLst/>
-          </a:prstGeom>
-          <a:noFill/>
-          <a:ln/>
-        </p:spPr>
-        <p:txBody>
-          <a:bodyPr wrap="square" lIns="0" tIns="0" rIns="0" bIns="0" rtlCol="0" anchor="ctr"/>
-          <a:lstStyle/>
-          <a:p>
-            <a:pPr algn="l" indent="0" marL="0">
-              <a:buNone/>
-            </a:pPr>
-            <a:r>
-              <a:rPr lang="en-US" sz="1600" dirty="0">
-                <a:solidFill>
-                  <a:schemeClr val="bg2"/>
-                </a:solidFill>
-              </a:rPr>
-              <a:t>Five things I would do differently, from the results above</a:t>
-            </a:r>
-            <a:endParaRPr lang="en-US" sz="1600" dirty="0"/>
-          </a:p>
-        </p:txBody>
-      </p:sp>
-      <p:sp>
-        <p:nvSpPr>
-          <p:cNvPr id="4" name="change Use the question body"/>
+          <p:cNvPr id="3" name="change Use the question body"/>
           <p:cNvSpPr/>
           <p:nvPr/>
         </p:nvSpPr>
@@ -12812,7 +12774,7 @@
       </p:sp>
       <p:sp>
         <p:nvSpPr>
-          <p:cNvPr id="5" name="icon circle book"/>
+          <p:cNvPr id="4" name="icon circle book"/>
           <p:cNvSpPr/>
           <p:nvPr/>
         </p:nvSpPr>
@@ -12832,7 +12794,7 @@
       </p:sp>
       <p:pic>
         <p:nvPicPr>
-          <p:cNvPr id="6" name="icon book" descr="/tmp/claude-0/-home-claude/8a3a1460-c291-5da5-a3bd-e15a8fc25c88/scratchpad/deck3/icons/book.png">    </p:cNvPr>
+          <p:cNvPr id="5" name="icon book" descr="Book icon">    </p:cNvPr>
           <p:cNvPicPr>
             <a:picLocks noChangeAspect="1"/>
           </p:cNvPicPr>
@@ -12856,14 +12818,50 @@
       </p:pic>
       <p:sp>
         <p:nvSpPr>
+          <p:cNvPr id="6" name="Text 3"/>
+          <p:cNvSpPr txBox="1"/>
+          <p:nvPr/>
+        </p:nvSpPr>
+        <p:spPr>
+          <a:xfrm>
+            <a:off x="1554480" y="1965960"/>
+            <a:ext cx="2331720" cy="548640"/>
+          </a:xfrm>
+          <a:prstGeom prst="rect">
+            <a:avLst/>
+          </a:prstGeom>
+          <a:noFill/>
+          <a:ln/>
+        </p:spPr>
+        <p:txBody>
+          <a:bodyPr wrap="square" lIns="0" tIns="0" rIns="0" bIns="0" rtlCol="0" anchor="ctr"/>
+          <a:lstStyle/>
+          <a:p>
+            <a:pPr indent="0" marL="0">
+              <a:buNone/>
+            </a:pPr>
+            <a:r>
+              <a:rPr lang="en-US" sz="1600" b="1" dirty="0">
+                <a:solidFill>
+                  <a:schemeClr val="bg1"/>
+                </a:solidFill>
+              </a:rPr>
+              <a:t>Use the question body</a:t>
+            </a:r>
+            <a:endParaRPr lang="en-US" sz="1600" dirty="0"/>
+          </a:p>
+        </p:txBody>
+      </p:sp>
+      <p:sp>
+        <p:nvSpPr>
           <p:cNvPr id="7" name="Text 4"/>
           <p:cNvSpPr txBox="1"/>
           <p:nvPr/>
         </p:nvSpPr>
         <p:spPr>
           <a:xfrm>
-            <a:off x="1554480" y="1965960"/>
-            <a:ext cx="2331720" cy="548640"/>
+            <a:off x="777240" y="2651760"/>
+            <a:ext cx="3063240" cy="1005840"/>
           </a:xfrm>
           <a:prstGeom prst="rect">
             <a:avLst/>
@@ -12872,49 +12870,13 @@
           <a:ln/>
         </p:spPr>
         <p:txBody>
-          <a:bodyPr wrap="square" lIns="0" tIns="0" rIns="0" bIns="0" rtlCol="0" anchor="ctr"/>
+          <a:bodyPr wrap="square" lIns="0" tIns="0" rIns="0" bIns="0" rtlCol="0" anchor="t"/>
           <a:lstStyle/>
           <a:p>
             <a:pPr indent="0" marL="0">
               <a:buNone/>
             </a:pPr>
             <a:r>
-              <a:rPr lang="en-US" sz="1600" b="1" dirty="0">
-                <a:solidFill>
-                  <a:schemeClr val="bg1"/>
-                </a:solidFill>
-              </a:rPr>
-              <a:t>Use the question body</a:t>
-            </a:r>
-            <a:endParaRPr lang="en-US" sz="1600" dirty="0"/>
-          </a:p>
-        </p:txBody>
-      </p:sp>
-      <p:sp>
-        <p:nvSpPr>
-          <p:cNvPr id="8" name="Text 5"/>
-          <p:cNvSpPr txBox="1"/>
-          <p:nvPr/>
-        </p:nvSpPr>
-        <p:spPr>
-          <a:xfrm>
-            <a:off x="777240" y="2651760"/>
-            <a:ext cx="3063240" cy="1005840"/>
-          </a:xfrm>
-          <a:prstGeom prst="rect">
-            <a:avLst/>
-          </a:prstGeom>
-          <a:noFill/>
-          <a:ln/>
-        </p:spPr>
-        <p:txBody>
-          <a:bodyPr wrap="square" lIns="0" tIns="0" rIns="0" bIns="0" rtlCol="0" anchor="t"/>
-          <a:lstStyle/>
-          <a:p>
-            <a:pPr indent="0" marL="0">
-              <a:buNone/>
-            </a:pPr>
-            <a:r>
               <a:rPr lang="en-US" sz="1400" dirty="0">
                 <a:solidFill>
                   <a:schemeClr val="bg2"/>
@@ -12928,7 +12890,7 @@
       </p:sp>
       <p:sp>
         <p:nvSpPr>
-          <p:cNvPr id="9" name="change Fix the cleanup"/>
+          <p:cNvPr id="8" name="change Fix the cleanup"/>
           <p:cNvSpPr/>
           <p:nvPr/>
         </p:nvSpPr>
@@ -12952,7 +12914,7 @@
       </p:sp>
       <p:sp>
         <p:nvSpPr>
-          <p:cNvPr id="10" name="icon circle broom"/>
+          <p:cNvPr id="9" name="icon circle broom"/>
           <p:cNvSpPr/>
           <p:nvPr/>
         </p:nvSpPr>
@@ -12972,7 +12934,7 @@
       </p:sp>
       <p:pic>
         <p:nvPicPr>
-          <p:cNvPr id="11" name="icon broom" descr="/tmp/claude-0/-home-claude/8a3a1460-c291-5da5-a3bd-e15a8fc25c88/scratchpad/deck3/icons/broom.png">    </p:cNvPr>
+          <p:cNvPr id="10" name="icon broom" descr="Broom icon">    </p:cNvPr>
           <p:cNvPicPr>
             <a:picLocks noChangeAspect="1"/>
           </p:cNvPicPr>
@@ -12996,14 +12958,50 @@
       </p:pic>
       <p:sp>
         <p:nvSpPr>
+          <p:cNvPr id="11" name="Text 7"/>
+          <p:cNvSpPr txBox="1"/>
+          <p:nvPr/>
+        </p:nvSpPr>
+        <p:spPr>
+          <a:xfrm>
+            <a:off x="5326380" y="1965960"/>
+            <a:ext cx="2331720" cy="548640"/>
+          </a:xfrm>
+          <a:prstGeom prst="rect">
+            <a:avLst/>
+          </a:prstGeom>
+          <a:noFill/>
+          <a:ln/>
+        </p:spPr>
+        <p:txBody>
+          <a:bodyPr wrap="square" lIns="0" tIns="0" rIns="0" bIns="0" rtlCol="0" anchor="ctr"/>
+          <a:lstStyle/>
+          <a:p>
+            <a:pPr indent="0" marL="0">
+              <a:buNone/>
+            </a:pPr>
+            <a:r>
+              <a:rPr lang="en-US" sz="1600" b="1" dirty="0">
+                <a:solidFill>
+                  <a:schemeClr val="bg1"/>
+                </a:solidFill>
+              </a:rPr>
+              <a:t>Fix the cleanup</a:t>
+            </a:r>
+            <a:endParaRPr lang="en-US" sz="1600" dirty="0"/>
+          </a:p>
+        </p:txBody>
+      </p:sp>
+      <p:sp>
+        <p:nvSpPr>
           <p:cNvPr id="12" name="Text 8"/>
           <p:cNvSpPr txBox="1"/>
           <p:nvPr/>
         </p:nvSpPr>
         <p:spPr>
           <a:xfrm>
-            <a:off x="5326380" y="1965960"/>
-            <a:ext cx="2331720" cy="548640"/>
+            <a:off x="4549140" y="2651760"/>
+            <a:ext cx="3063240" cy="1005840"/>
           </a:xfrm>
           <a:prstGeom prst="rect">
             <a:avLst/>
@@ -13012,49 +13010,13 @@
           <a:ln/>
         </p:spPr>
         <p:txBody>
-          <a:bodyPr wrap="square" lIns="0" tIns="0" rIns="0" bIns="0" rtlCol="0" anchor="ctr"/>
+          <a:bodyPr wrap="square" lIns="0" tIns="0" rIns="0" bIns="0" rtlCol="0" anchor="t"/>
           <a:lstStyle/>
           <a:p>
             <a:pPr indent="0" marL="0">
               <a:buNone/>
             </a:pPr>
             <a:r>
-              <a:rPr lang="en-US" sz="1600" b="1" dirty="0">
-                <a:solidFill>
-                  <a:schemeClr val="bg1"/>
-                </a:solidFill>
-              </a:rPr>
-              <a:t>Fix the cleanup</a:t>
-            </a:r>
-            <a:endParaRPr lang="en-US" sz="1600" dirty="0"/>
-          </a:p>
-        </p:txBody>
-      </p:sp>
-      <p:sp>
-        <p:nvSpPr>
-          <p:cNvPr id="13" name="Text 9"/>
-          <p:cNvSpPr txBox="1"/>
-          <p:nvPr/>
-        </p:nvSpPr>
-        <p:spPr>
-          <a:xfrm>
-            <a:off x="4549140" y="2651760"/>
-            <a:ext cx="3063240" cy="1005840"/>
-          </a:xfrm>
-          <a:prstGeom prst="rect">
-            <a:avLst/>
-          </a:prstGeom>
-          <a:noFill/>
-          <a:ln/>
-        </p:spPr>
-        <p:txBody>
-          <a:bodyPr wrap="square" lIns="0" tIns="0" rIns="0" bIns="0" rtlCol="0" anchor="t"/>
-          <a:lstStyle/>
-          <a:p>
-            <a:pPr indent="0" marL="0">
-              <a:buNone/>
-            </a:pPr>
-            <a:r>
               <a:rPr lang="en-US" sz="1400" dirty="0">
                 <a:solidFill>
                   <a:schemeClr val="bg2"/>
@@ -13068,7 +13030,7 @@
       </p:sp>
       <p:sp>
         <p:nvSpPr>
-          <p:cNvPr id="14" name="change One cutoff per tag"/>
+          <p:cNvPr id="13" name="change One cutoff per tag"/>
           <p:cNvSpPr/>
           <p:nvPr/>
         </p:nvSpPr>
@@ -13092,7 +13054,7 @@
       </p:sp>
       <p:sp>
         <p:nvSpPr>
-          <p:cNvPr id="15" name="icon circle sliders"/>
+          <p:cNvPr id="14" name="icon circle sliders"/>
           <p:cNvSpPr/>
           <p:nvPr/>
         </p:nvSpPr>
@@ -13112,7 +13074,7 @@
       </p:sp>
       <p:pic>
         <p:nvPicPr>
-          <p:cNvPr id="16" name="icon sliders" descr="/tmp/claude-0/-home-claude/8a3a1460-c291-5da5-a3bd-e15a8fc25c88/scratchpad/deck3/icons/sliders.png">    </p:cNvPr>
+          <p:cNvPr id="15" name="icon sliders" descr="Sliders icon">    </p:cNvPr>
           <p:cNvPicPr>
             <a:picLocks noChangeAspect="1"/>
           </p:cNvPicPr>
@@ -13136,14 +13098,50 @@
       </p:pic>
       <p:sp>
         <p:nvSpPr>
+          <p:cNvPr id="16" name="Text 11"/>
+          <p:cNvSpPr txBox="1"/>
+          <p:nvPr/>
+        </p:nvSpPr>
+        <p:spPr>
+          <a:xfrm>
+            <a:off x="9098280" y="1965960"/>
+            <a:ext cx="2331720" cy="548640"/>
+          </a:xfrm>
+          <a:prstGeom prst="rect">
+            <a:avLst/>
+          </a:prstGeom>
+          <a:noFill/>
+          <a:ln/>
+        </p:spPr>
+        <p:txBody>
+          <a:bodyPr wrap="square" lIns="0" tIns="0" rIns="0" bIns="0" rtlCol="0" anchor="ctr"/>
+          <a:lstStyle/>
+          <a:p>
+            <a:pPr indent="0" marL="0">
+              <a:buNone/>
+            </a:pPr>
+            <a:r>
+              <a:rPr lang="en-US" sz="1600" b="1" dirty="0">
+                <a:solidFill>
+                  <a:schemeClr val="bg1"/>
+                </a:solidFill>
+              </a:rPr>
+              <a:t>One cutoff per tag</a:t>
+            </a:r>
+            <a:endParaRPr lang="en-US" sz="1600" dirty="0"/>
+          </a:p>
+        </p:txBody>
+      </p:sp>
+      <p:sp>
+        <p:nvSpPr>
           <p:cNvPr id="17" name="Text 12"/>
           <p:cNvSpPr txBox="1"/>
           <p:nvPr/>
         </p:nvSpPr>
         <p:spPr>
           <a:xfrm>
-            <a:off x="9098280" y="1965960"/>
-            <a:ext cx="2331720" cy="548640"/>
+            <a:off x="8321040" y="2651760"/>
+            <a:ext cx="3063240" cy="1005840"/>
           </a:xfrm>
           <a:prstGeom prst="rect">
             <a:avLst/>
@@ -13152,49 +13150,13 @@
           <a:ln/>
         </p:spPr>
         <p:txBody>
-          <a:bodyPr wrap="square" lIns="0" tIns="0" rIns="0" bIns="0" rtlCol="0" anchor="ctr"/>
+          <a:bodyPr wrap="square" lIns="0" tIns="0" rIns="0" bIns="0" rtlCol="0" anchor="t"/>
           <a:lstStyle/>
           <a:p>
             <a:pPr indent="0" marL="0">
               <a:buNone/>
             </a:pPr>
             <a:r>
-              <a:rPr lang="en-US" sz="1600" b="1" dirty="0">
-                <a:solidFill>
-                  <a:schemeClr val="bg1"/>
-                </a:solidFill>
-              </a:rPr>
-              <a:t>One cutoff per tag</a:t>
-            </a:r>
-            <a:endParaRPr lang="en-US" sz="1600" dirty="0"/>
-          </a:p>
-        </p:txBody>
-      </p:sp>
-      <p:sp>
-        <p:nvSpPr>
-          <p:cNvPr id="18" name="Text 13"/>
-          <p:cNvSpPr txBox="1"/>
-          <p:nvPr/>
-        </p:nvSpPr>
-        <p:spPr>
-          <a:xfrm>
-            <a:off x="8321040" y="2651760"/>
-            <a:ext cx="3063240" cy="1005840"/>
-          </a:xfrm>
-          <a:prstGeom prst="rect">
-            <a:avLst/>
-          </a:prstGeom>
-          <a:noFill/>
-          <a:ln/>
-        </p:spPr>
-        <p:txBody>
-          <a:bodyPr wrap="square" lIns="0" tIns="0" rIns="0" bIns="0" rtlCol="0" anchor="t"/>
-          <a:lstStyle/>
-          <a:p>
-            <a:pPr indent="0" marL="0">
-              <a:buNone/>
-            </a:pPr>
-            <a:r>
               <a:rPr lang="en-US" sz="1400" dirty="0">
                 <a:solidFill>
                   <a:schemeClr val="bg2"/>
@@ -13208,7 +13170,7 @@
       </p:sp>
       <p:sp>
         <p:nvSpPr>
-          <p:cNvPr id="19" name="change Newer data"/>
+          <p:cNvPr id="18" name="change Newer data"/>
           <p:cNvSpPr/>
           <p:nvPr/>
         </p:nvSpPr>
@@ -13232,7 +13194,7 @@
       </p:sp>
       <p:sp>
         <p:nvSpPr>
-          <p:cNvPr id="20" name="icon circle calendar"/>
+          <p:cNvPr id="19" name="icon circle calendar"/>
           <p:cNvSpPr/>
           <p:nvPr/>
         </p:nvSpPr>
@@ -13252,7 +13214,7 @@
       </p:sp>
       <p:pic>
         <p:nvPicPr>
-          <p:cNvPr id="21" name="icon calendar" descr="/tmp/claude-0/-home-claude/8a3a1460-c291-5da5-a3bd-e15a8fc25c88/scratchpad/deck3/icons/calendar.png">    </p:cNvPr>
+          <p:cNvPr id="20" name="icon calendar" descr="Calendar icon">    </p:cNvPr>
           <p:cNvPicPr>
             <a:picLocks noChangeAspect="1"/>
           </p:cNvPicPr>
@@ -13276,14 +13238,50 @@
       </p:pic>
       <p:sp>
         <p:nvSpPr>
+          <p:cNvPr id="21" name="Text 15"/>
+          <p:cNvSpPr txBox="1"/>
+          <p:nvPr/>
+        </p:nvSpPr>
+        <p:spPr>
+          <a:xfrm>
+            <a:off x="3440430" y="4297680"/>
+            <a:ext cx="2331720" cy="548640"/>
+          </a:xfrm>
+          <a:prstGeom prst="rect">
+            <a:avLst/>
+          </a:prstGeom>
+          <a:noFill/>
+          <a:ln/>
+        </p:spPr>
+        <p:txBody>
+          <a:bodyPr wrap="square" lIns="0" tIns="0" rIns="0" bIns="0" rtlCol="0" anchor="ctr"/>
+          <a:lstStyle/>
+          <a:p>
+            <a:pPr indent="0" marL="0">
+              <a:buNone/>
+            </a:pPr>
+            <a:r>
+              <a:rPr lang="en-US" sz="1600" b="1" dirty="0">
+                <a:solidFill>
+                  <a:schemeClr val="bg1"/>
+                </a:solidFill>
+              </a:rPr>
+              <a:t>Newer data</a:t>
+            </a:r>
+            <a:endParaRPr lang="en-US" sz="1600" dirty="0"/>
+          </a:p>
+        </p:txBody>
+      </p:sp>
+      <p:sp>
+        <p:nvSpPr>
           <p:cNvPr id="22" name="Text 16"/>
           <p:cNvSpPr txBox="1"/>
           <p:nvPr/>
         </p:nvSpPr>
         <p:spPr>
           <a:xfrm>
-            <a:off x="3440430" y="4297680"/>
-            <a:ext cx="2331720" cy="548640"/>
+            <a:off x="2663190" y="4983480"/>
+            <a:ext cx="3063240" cy="1005840"/>
           </a:xfrm>
           <a:prstGeom prst="rect">
             <a:avLst/>
@@ -13292,49 +13290,13 @@
           <a:ln/>
         </p:spPr>
         <p:txBody>
-          <a:bodyPr wrap="square" lIns="0" tIns="0" rIns="0" bIns="0" rtlCol="0" anchor="ctr"/>
+          <a:bodyPr wrap="square" lIns="0" tIns="0" rIns="0" bIns="0" rtlCol="0" anchor="t"/>
           <a:lstStyle/>
           <a:p>
             <a:pPr indent="0" marL="0">
               <a:buNone/>
             </a:pPr>
             <a:r>
-              <a:rPr lang="en-US" sz="1600" b="1" dirty="0">
-                <a:solidFill>
-                  <a:schemeClr val="bg1"/>
-                </a:solidFill>
-              </a:rPr>
-              <a:t>Newer data</a:t>
-            </a:r>
-            <a:endParaRPr lang="en-US" sz="1600" dirty="0"/>
-          </a:p>
-        </p:txBody>
-      </p:sp>
-      <p:sp>
-        <p:nvSpPr>
-          <p:cNvPr id="23" name="Text 17"/>
-          <p:cNvSpPr txBox="1"/>
-          <p:nvPr/>
-        </p:nvSpPr>
-        <p:spPr>
-          <a:xfrm>
-            <a:off x="2663190" y="4983480"/>
-            <a:ext cx="3063240" cy="1005840"/>
-          </a:xfrm>
-          <a:prstGeom prst="rect">
-            <a:avLst/>
-          </a:prstGeom>
-          <a:noFill/>
-          <a:ln/>
-        </p:spPr>
-        <p:txBody>
-          <a:bodyPr wrap="square" lIns="0" tIns="0" rIns="0" bIns="0" rtlCol="0" anchor="t"/>
-          <a:lstStyle/>
-          <a:p>
-            <a:pPr indent="0" marL="0">
-              <a:buNone/>
-            </a:pPr>
-            <a:r>
               <a:rPr lang="en-US" sz="1400" dirty="0">
                 <a:solidFill>
                   <a:schemeClr val="bg2"/>
@@ -13348,7 +13310,7 @@
       </p:sp>
       <p:sp>
         <p:nvSpPr>
-          <p:cNvPr id="24" name="change More tags"/>
+          <p:cNvPr id="23" name="change More tags"/>
           <p:cNvSpPr/>
           <p:nvPr/>
         </p:nvSpPr>
@@ -13372,7 +13334,7 @@
       </p:sp>
       <p:sp>
         <p:nvSpPr>
-          <p:cNvPr id="25" name="icon circle tags"/>
+          <p:cNvPr id="24" name="icon circle tags"/>
           <p:cNvSpPr/>
           <p:nvPr/>
         </p:nvSpPr>
@@ -13392,7 +13354,7 @@
       </p:sp>
       <p:pic>
         <p:nvPicPr>
-          <p:cNvPr id="26" name="icon tags" descr="/tmp/claude-0/-home-claude/8a3a1460-c291-5da5-a3bd-e15a8fc25c88/scratchpad/deck3/icons/tags.png">    </p:cNvPr>
+          <p:cNvPr id="25" name="icon tags" descr="Tags icon">    </p:cNvPr>
           <p:cNvPicPr>
             <a:picLocks noChangeAspect="1"/>
           </p:cNvPicPr>
@@ -13416,14 +13378,50 @@
       </p:pic>
       <p:sp>
         <p:nvSpPr>
+          <p:cNvPr id="26" name="Text 19"/>
+          <p:cNvSpPr txBox="1"/>
+          <p:nvPr/>
+        </p:nvSpPr>
+        <p:spPr>
+          <a:xfrm>
+            <a:off x="7212330" y="4297680"/>
+            <a:ext cx="2331720" cy="548640"/>
+          </a:xfrm>
+          <a:prstGeom prst="rect">
+            <a:avLst/>
+          </a:prstGeom>
+          <a:noFill/>
+          <a:ln/>
+        </p:spPr>
+        <p:txBody>
+          <a:bodyPr wrap="square" lIns="0" tIns="0" rIns="0" bIns="0" rtlCol="0" anchor="ctr"/>
+          <a:lstStyle/>
+          <a:p>
+            <a:pPr indent="0" marL="0">
+              <a:buNone/>
+            </a:pPr>
+            <a:r>
+              <a:rPr lang="en-US" sz="1600" b="1" dirty="0">
+                <a:solidFill>
+                  <a:schemeClr val="bg1"/>
+                </a:solidFill>
+              </a:rPr>
+              <a:t>More tags</a:t>
+            </a:r>
+            <a:endParaRPr lang="en-US" sz="1600" dirty="0"/>
+          </a:p>
+        </p:txBody>
+      </p:sp>
+      <p:sp>
+        <p:nvSpPr>
           <p:cNvPr id="27" name="Text 20"/>
           <p:cNvSpPr txBox="1"/>
           <p:nvPr/>
         </p:nvSpPr>
         <p:spPr>
           <a:xfrm>
-            <a:off x="7212330" y="4297680"/>
-            <a:ext cx="2331720" cy="548640"/>
+            <a:off x="6435090" y="4983480"/>
+            <a:ext cx="3063240" cy="1005840"/>
           </a:xfrm>
           <a:prstGeom prst="rect">
             <a:avLst/>
@@ -13432,21 +13430,21 @@
           <a:ln/>
         </p:spPr>
         <p:txBody>
-          <a:bodyPr wrap="square" lIns="0" tIns="0" rIns="0" bIns="0" rtlCol="0" anchor="ctr"/>
+          <a:bodyPr wrap="square" lIns="0" tIns="0" rIns="0" bIns="0" rtlCol="0" anchor="t"/>
           <a:lstStyle/>
           <a:p>
             <a:pPr indent="0" marL="0">
               <a:buNone/>
             </a:pPr>
             <a:r>
-              <a:rPr lang="en-US" sz="1600" b="1" dirty="0">
-                <a:solidFill>
-                  <a:schemeClr val="bg1"/>
-                </a:solidFill>
-              </a:rPr>
-              <a:t>More tags</a:t>
-            </a:r>
-            <a:endParaRPr lang="en-US" sz="1600" dirty="0"/>
+              <a:rPr lang="en-US" sz="1400" dirty="0">
+                <a:solidFill>
+                  <a:schemeClr val="bg2"/>
+                </a:solidFill>
+              </a:rPr>
+              <a:t>Only the 100 most common tags were modeled; 6,784 were left out.</a:t>
+            </a:r>
+            <a:endParaRPr lang="en-US" sz="1400" dirty="0"/>
           </a:p>
         </p:txBody>
       </p:sp>
@@ -13458,8 +13456,8 @@
         </p:nvSpPr>
         <p:spPr>
           <a:xfrm>
-            <a:off x="6435090" y="4983480"/>
-            <a:ext cx="3063240" cy="1005840"/>
+            <a:off x="548640" y="6309360"/>
+            <a:ext cx="10424160" cy="320040"/>
           </a:xfrm>
           <a:prstGeom prst="rect">
             <a:avLst/>
@@ -13475,27 +13473,29 @@
               <a:buNone/>
             </a:pPr>
             <a:r>
-              <a:rPr lang="en-US" sz="1400" dirty="0">
+              <a:rPr lang="en-US" sz="1200" dirty="0">
                 <a:solidFill>
                   <a:schemeClr val="bg2"/>
                 </a:solidFill>
               </a:rPr>
-              <a:t>Only the 100 most common tags were modeled; 6,784 were left out.</a:t>
-            </a:r>
-            <a:endParaRPr lang="en-US" sz="1400" dirty="0"/>
-          </a:p>
-        </p:txBody>
-      </p:sp>
-      <p:sp>
-        <p:nvSpPr>
-          <p:cNvPr id="29" name="Text 22"/>
-          <p:cNvSpPr txBox="1"/>
-          <p:nvPr/>
-        </p:nvSpPr>
-        <p:spPr>
-          <a:xfrm>
-            <a:off x="548640" y="6309360"/>
-            <a:ext cx="10424160" cy="320040"/>
+              <a:t>Code, notebook and these slides: github.com/garrethcline/Predicting-Tags-from-StackOverflow-Using-Title-Data-</a:t>
+            </a:r>
+            <a:endParaRPr lang="en-US" sz="1200" dirty="0"/>
+          </a:p>
+        </p:txBody>
+      </p:sp>
+      <p:sp>
+        <p:nvSpPr>
+          <p:cNvPr id="29" name="Text 0"/>
+          <p:cNvSpPr/>
+          <p:nvPr>
+            <p:ph idx="101" type="body" hasCustomPrompt="1"/>
+          </p:nvPr>
+        </p:nvSpPr>
+        <p:spPr>
+          <a:xfrm>
+            <a:off x="548640" y="987552"/>
+            <a:ext cx="11064240" cy="411480"/>
           </a:xfrm>
           <a:prstGeom prst="rect">
             <a:avLst/>
@@ -13504,21 +13504,13 @@
           <a:ln/>
         </p:spPr>
         <p:txBody>
-          <a:bodyPr wrap="square" lIns="0" tIns="0" rIns="0" bIns="0" rtlCol="0" anchor="t"/>
-          <a:lstStyle/>
-          <a:p>
-            <a:pPr indent="0" marL="0">
-              <a:buNone/>
-            </a:pPr>
-            <a:r>
-              <a:rPr lang="en-US" sz="1200" dirty="0">
-                <a:solidFill>
-                  <a:schemeClr val="bg2"/>
-                </a:solidFill>
-              </a:rPr>
-              <a:t>Code, notebook and these slides: github.com/garrethcline/Predicting-Tags-from-StackOverflow-Using-Title-Data-</a:t>
-            </a:r>
-            <a:endParaRPr lang="en-US" sz="1200" dirty="0"/>
+          <a:bodyPr wrap="square" lIns="0" tIns="0" rIns="0" bIns="0" rtlCol="0" anchor="ctr"/>
+          <a:lstStyle/>
+          <a:p>
+            <a:pPr algn="l" indent="0" marL="0">
+              <a:buNone/>
+            </a:pPr>
+            <a:endParaRPr lang="en-US" sz="1600" dirty="0"/>
           </a:p>
         </p:txBody>
       </p:sp>
@@ -13690,7 +13682,7 @@
       </p:sp>
       <p:pic>
         <p:nvPicPr>
-          <p:cNvPr id="5" name="icon pen" descr="/tmp/claude-0/-home-claude/8a3a1460-c291-5da5-a3bd-e15a8fc25c88/scratchpad/deck3/icons/pen.png">    </p:cNvPr>
+          <p:cNvPr id="5" name="icon pen" descr="Pencil icon">    </p:cNvPr>
           <p:cNvPicPr>
             <a:picLocks noChangeAspect="1"/>
           </p:cNvPicPr>
@@ -13778,7 +13770,7 @@
                   <a:schemeClr val="accent6"/>
                 </a:solidFill>
               </a:rPr>
-              <a:t>Recommend tags while a question is still being written.</a:t>
+              <a:t>The title is the first thing people type, so suggestions could show up before the body is started.</a:t>
             </a:r>
             <a:endParaRPr lang="en-US" sz="1400" dirty="0"/>
           </a:p>
@@ -13806,7 +13798,7 @@
       </p:sp>
       <p:pic>
         <p:nvPicPr>
-          <p:cNvPr id="9" name="icon archive" descr="/tmp/claude-0/-home-claude/8a3a1460-c291-5da5-a3bd-e15a8fc25c88/scratchpad/deck3/icons/archive.png">    </p:cNvPr>
+          <p:cNvPr id="9" name="icon archive" descr="Archive box icon">    </p:cNvPr>
           <p:cNvPicPr>
             <a:picLocks noChangeAspect="1"/>
           </p:cNvPicPr>
@@ -13894,7 +13886,7 @@
                   <a:schemeClr val="accent6"/>
                 </a:solidFill>
               </a:rPr>
-              <a:t>Add tags to posts or other text that has none.</a:t>
+              <a:t>Run the same model over text that never had tags, like old forum posts.</a:t>
             </a:r>
             <a:endParaRPr lang="en-US" sz="1400" dirty="0"/>
           </a:p>
@@ -13922,7 +13914,7 @@
       </p:sp>
       <p:pic>
         <p:nvPicPr>
-          <p:cNvPr id="13" name="icon tags" descr="/tmp/claude-0/-home-claude/8a3a1460-c291-5da5-a3bd-e15a8fc25c88/scratchpad/deck3/icons/tags.png">    </p:cNvPr>
+          <p:cNvPr id="13" name="icon tags" descr="Tags icon">    </p:cNvPr>
           <p:cNvPicPr>
             <a:picLocks noChangeAspect="1"/>
           </p:cNvPicPr>
@@ -16618,7 +16610,7 @@
       </p:sp>
       <p:pic>
         <p:nvPicPr>
-          <p:cNvPr id="5" name="icon archive" descr="/tmp/claude-0/-home-claude/8a3a1460-c291-5da5-a3bd-e15a8fc25c88/scratchpad/deck3/icons/archive.png">    </p:cNvPr>
+          <p:cNvPr id="5" name="icon archive" descr="Archive box icon">    </p:cNvPr>
           <p:cNvPicPr>
             <a:picLocks noChangeAspect="1"/>
           </p:cNvPicPr>
@@ -16758,7 +16750,7 @@
       </p:sp>
       <p:pic>
         <p:nvPicPr>
-          <p:cNvPr id="10" name="icon database" descr="/tmp/claude-0/-home-claude/8a3a1460-c291-5da5-a3bd-e15a8fc25c88/scratchpad/deck3/icons/database.png">    </p:cNvPr>
+          <p:cNvPr id="10" name="icon database" descr="Database icon">    </p:cNvPr>
           <p:cNvPicPr>
             <a:picLocks noChangeAspect="1"/>
           </p:cNvPicPr>
@@ -16898,7 +16890,7 @@
       </p:sp>
       <p:pic>
         <p:nvPicPr>
-          <p:cNvPr id="15" name="icon csv" descr="/tmp/claude-0/-home-claude/8a3a1460-c291-5da5-a3bd-e15a8fc25c88/scratchpad/deck3/icons/csv.png">    </p:cNvPr>
+          <p:cNvPr id="15" name="icon csv" descr="CSV file icon">    </p:cNvPr>
           <p:cNvPicPr>
             <a:picLocks noChangeAspect="1"/>
           </p:cNvPicPr>
@@ -17038,7 +17030,7 @@
       </p:sp>
       <p:pic>
         <p:nvPicPr>
-          <p:cNvPr id="20" name="icon python" descr="/tmp/claude-0/-home-claude/8a3a1460-c291-5da5-a3bd-e15a8fc25c88/scratchpad/deck3/icons/python.png">    </p:cNvPr>
+          <p:cNvPr id="20" name="icon python" descr="Python icon">    </p:cNvPr>
           <p:cNvPicPr>
             <a:picLocks noChangeAspect="1"/>
           </p:cNvPicPr>
@@ -19102,7 +19094,7 @@
       </p:sp>
       <p:sp>
         <p:nvSpPr>
-          <p:cNvPr id="9" name="stat of questions have c#"/>
+          <p:cNvPr id="9" name="stat of test questions have c#"/>
           <p:cNvSpPr/>
           <p:nvPr/>
         </p:nvSpPr>
@@ -19188,7 +19180,7 @@
                   <a:schemeClr val="tx1"/>
                 </a:solidFill>
               </a:rPr>
-              <a:t>of questions have c#</a:t>
+              <a:t>of test questions have c#</a:t>
             </a:r>
             <a:endParaRPr lang="en-US" sz="1500" dirty="0"/>
           </a:p>
@@ -19232,7 +19224,7 @@
       </p:sp>
       <p:sp>
         <p:nvSpPr>
-          <p:cNvPr id="13" name="stat have parsing"/>
+          <p:cNvPr id="13" name="stat test questions have parsing"/>
           <p:cNvSpPr/>
           <p:nvPr/>
         </p:nvSpPr>
@@ -19318,7 +19310,7 @@
                   <a:schemeClr val="tx1"/>
                 </a:solidFill>
               </a:rPr>
-              <a:t>have parsing</a:t>
+              <a:t>test questions have parsing</a:t>
             </a:r>
             <a:endParaRPr lang="en-US" sz="1500" dirty="0"/>
           </a:p>
@@ -19354,7 +19346,7 @@
                   <a:schemeClr val="accent6"/>
                 </a:solidFill>
               </a:rPr>
-              <a:t>the least common of the 100</a:t>
+              <a:t>the fewest of the 100 tags</a:t>
             </a:r>
             <a:endParaRPr lang="en-US" sz="1300" dirty="0"/>
           </a:p>
@@ -20510,23 +20502,12 @@
               <a:buNone/>
             </a:pPr>
             <a:r>
-              <a:rPr lang="en-US" sz="1400" b="1" dirty="0">
+              <a:rPr lang="en-US" sz="1400" dirty="0">
                 <a:solidFill>
                   <a:schemeClr val="tx1"/>
                 </a:solidFill>
               </a:rPr>
-              <a:t>Something I noticed in 2026: </a:t>
-            </a:r>
-            <a:pPr indent="0" marL="0">
-              <a:buNone/>
-            </a:pPr>
-            <a:r>
-              <a:rPr lang="en-US" sz="1400" dirty="0">
-                <a:solidFill>
-                  <a:schemeClr val="tx1"/>
-                </a:solidFill>
-              </a:rPr>
-              <a:t>capitalized common words like “How” got through, because the common-word filter only matched lower case.</a:t>
+              <a:t>In 2026 I noticed that capitalized common words like “How” got through, because the common-word filter only matched lower case.</a:t>
             </a:r>
             <a:endParaRPr lang="en-US" sz="1400" dirty="0"/>
           </a:p>
